--- a/Presentacion_Caso_A_Final.pptx
+++ b/Presentacion_Caso_A_Final.pptx
@@ -29,8 +29,9 @@
     <p:sldId id="329" r:id="rId23"/>
     <p:sldId id="301" r:id="rId24"/>
     <p:sldId id="330" r:id="rId25"/>
-    <p:sldId id="306" r:id="rId26"/>
-    <p:sldId id="307" r:id="rId27"/>
+    <p:sldId id="308" r:id="rId26"/>
+    <p:sldId id="306" r:id="rId27"/>
+    <p:sldId id="307" r:id="rId28"/>
   </p:sldIdLst>
   <p:sldSz cx="12192000" cy="6858000"/>
   <p:notesSz cx="6858000" cy="9144000"/>
@@ -38305,6 +38306,898 @@
             <a:avLst/>
           </a:prstGeom>
           <a:solidFill>
+            <a:srgbClr val="F4F2ED"/>
+          </a:solidFill>
+          <a:ln>
+            <a:noFill/>
+          </a:ln>
+          <a:effectLst/>
+        </p:spPr>
+        <p:style>
+          <a:lnRef idx="1">
+            <a:schemeClr val="accent1"/>
+          </a:lnRef>
+          <a:fillRef idx="3">
+            <a:schemeClr val="accent1"/>
+          </a:fillRef>
+          <a:effectRef idx="2">
+            <a:schemeClr val="accent1"/>
+          </a:effectRef>
+          <a:fontRef idx="minor">
+            <a:schemeClr val="lt1"/>
+          </a:fontRef>
+        </p:style>
+        <p:txBody>
+          <a:bodyPr rtlCol="0" anchor="ctr"/>
+          <a:lstStyle/>
+          <a:p>
+            <a:pPr algn="ctr"/>
+            <a:endParaRPr/>
+          </a:p>
+        </p:txBody>
+      </p:sp>
+      <p:sp>
+        <p:nvSpPr>
+          <p:cNvPr id="3" name="Rectangle 2"/>
+          <p:cNvSpPr/>
+          <p:nvPr/>
+        </p:nvSpPr>
+        <p:spPr>
+          <a:xfrm>
+            <a:off x="0" y="0"/>
+            <a:ext cx="114300" cy="6858000"/>
+          </a:xfrm>
+          <a:prstGeom prst="rect">
+            <a:avLst/>
+          </a:prstGeom>
+          <a:solidFill>
+            <a:srgbClr val="8C2F39"/>
+          </a:solidFill>
+          <a:ln>
+            <a:noFill/>
+          </a:ln>
+          <a:effectLst/>
+        </p:spPr>
+        <p:style>
+          <a:lnRef idx="1">
+            <a:schemeClr val="accent1"/>
+          </a:lnRef>
+          <a:fillRef idx="3">
+            <a:schemeClr val="accent1"/>
+          </a:fillRef>
+          <a:effectRef idx="2">
+            <a:schemeClr val="accent1"/>
+          </a:effectRef>
+          <a:fontRef idx="minor">
+            <a:schemeClr val="lt1"/>
+          </a:fontRef>
+        </p:style>
+        <p:txBody>
+          <a:bodyPr rtlCol="0" anchor="ctr"/>
+          <a:lstStyle/>
+          <a:p>
+            <a:pPr algn="ctr"/>
+            <a:endParaRPr/>
+          </a:p>
+        </p:txBody>
+      </p:sp>
+      <p:sp>
+        <p:nvSpPr>
+          <p:cNvPr id="4" name="TextBox 3"/>
+          <p:cNvSpPr txBox="1"/>
+          <p:nvPr/>
+        </p:nvSpPr>
+        <p:spPr>
+          <a:xfrm>
+            <a:off x="777240" y="822960"/>
+            <a:ext cx="10058400" cy="274320"/>
+          </a:xfrm>
+          <a:prstGeom prst="rect">
+            <a:avLst/>
+          </a:prstGeom>
+          <a:noFill/>
+        </p:spPr>
+        <p:txBody>
+          <a:bodyPr wrap="square" lIns="0" tIns="0" rIns="0" bIns="0">
+            <a:spAutoFit/>
+          </a:bodyPr>
+          <a:lstStyle/>
+          <a:p>
+            <a:pPr algn="l">
+              <a:lnSpc>
+                <a:spcPct val="122000"/>
+              </a:lnSpc>
+              <a:spcBef>
+                <a:spcPts val="0"/>
+              </a:spcBef>
+              <a:spcAft>
+                <a:spcPts val="0"/>
+              </a:spcAft>
+            </a:pPr>
+            <a:r>
+              <a:rPr sz="1200" b="1">
+                <a:solidFill>
+                  <a:srgbClr val="8C2F39"/>
+                </a:solidFill>
+                <a:latin typeface="Arial"/>
+              </a:rPr>
+              <a:t>PARA LLEVARSE</a:t>
+            </a:r>
+          </a:p>
+        </p:txBody>
+      </p:sp>
+      <p:sp>
+        <p:nvSpPr>
+          <p:cNvPr id="5" name="TextBox 4"/>
+          <p:cNvSpPr txBox="1"/>
+          <p:nvPr/>
+        </p:nvSpPr>
+        <p:spPr>
+          <a:xfrm>
+            <a:off x="777240" y="1280160"/>
+            <a:ext cx="10058400" cy="731520"/>
+          </a:xfrm>
+          <a:prstGeom prst="rect">
+            <a:avLst/>
+          </a:prstGeom>
+          <a:noFill/>
+        </p:spPr>
+        <p:txBody>
+          <a:bodyPr wrap="square" lIns="0" tIns="0" rIns="0" bIns="0">
+            <a:spAutoFit/>
+          </a:bodyPr>
+          <a:lstStyle/>
+          <a:p>
+            <a:pPr algn="l">
+              <a:lnSpc>
+                <a:spcPct val="105000"/>
+              </a:lnSpc>
+              <a:spcBef>
+                <a:spcPts val="0"/>
+              </a:spcBef>
+              <a:spcAft>
+                <a:spcPts val="0"/>
+              </a:spcAft>
+            </a:pPr>
+            <a:r>
+              <a:rPr sz="3400" b="1">
+                <a:solidFill>
+                  <a:srgbClr val="17150F"/>
+                </a:solidFill>
+                <a:latin typeface="Arial"/>
+              </a:rPr>
+              <a:t>Cuatro mensajes</a:t>
+            </a:r>
+          </a:p>
+        </p:txBody>
+      </p:sp>
+      <p:sp>
+        <p:nvSpPr>
+          <p:cNvPr id="6" name="Rectangle 5"/>
+          <p:cNvSpPr/>
+          <p:nvPr/>
+        </p:nvSpPr>
+        <p:spPr>
+          <a:xfrm>
+            <a:off x="777240" y="2286000"/>
+            <a:ext cx="10637215" cy="914400"/>
+          </a:xfrm>
+          <a:prstGeom prst="rect">
+            <a:avLst/>
+          </a:prstGeom>
+          <a:solidFill>
+            <a:srgbClr val="FFFFFF"/>
+          </a:solidFill>
+          <a:ln w="9525">
+            <a:solidFill>
+              <a:srgbClr val="DCD8CF"/>
+            </a:solidFill>
+          </a:ln>
+          <a:effectLst/>
+        </p:spPr>
+        <p:style>
+          <a:lnRef idx="1">
+            <a:schemeClr val="accent1"/>
+          </a:lnRef>
+          <a:fillRef idx="3">
+            <a:schemeClr val="accent1"/>
+          </a:fillRef>
+          <a:effectRef idx="2">
+            <a:schemeClr val="accent1"/>
+          </a:effectRef>
+          <a:fontRef idx="minor">
+            <a:schemeClr val="lt1"/>
+          </a:fontRef>
+        </p:style>
+        <p:txBody>
+          <a:bodyPr rtlCol="0" anchor="ctr"/>
+          <a:lstStyle/>
+          <a:p>
+            <a:pPr algn="ctr"/>
+            <a:endParaRPr/>
+          </a:p>
+        </p:txBody>
+      </p:sp>
+      <p:sp>
+        <p:nvSpPr>
+          <p:cNvPr id="7" name="TextBox 6"/>
+          <p:cNvSpPr txBox="1"/>
+          <p:nvPr/>
+        </p:nvSpPr>
+        <p:spPr>
+          <a:xfrm>
+            <a:off x="1014984" y="2468880"/>
+            <a:ext cx="365760" cy="548640"/>
+          </a:xfrm>
+          <a:prstGeom prst="rect">
+            <a:avLst/>
+          </a:prstGeom>
+          <a:noFill/>
+        </p:spPr>
+        <p:txBody>
+          <a:bodyPr wrap="square" lIns="0" tIns="0" rIns="0" bIns="0">
+            <a:spAutoFit/>
+          </a:bodyPr>
+          <a:lstStyle/>
+          <a:p>
+            <a:pPr algn="l">
+              <a:lnSpc>
+                <a:spcPct val="100000"/>
+              </a:lnSpc>
+              <a:spcBef>
+                <a:spcPts val="0"/>
+              </a:spcBef>
+              <a:spcAft>
+                <a:spcPts val="0"/>
+              </a:spcAft>
+            </a:pPr>
+            <a:r>
+              <a:rPr sz="2200" b="1">
+                <a:solidFill>
+                  <a:srgbClr val="8C2F39"/>
+                </a:solidFill>
+                <a:latin typeface="Arial"/>
+              </a:rPr>
+              <a:t>1</a:t>
+            </a:r>
+          </a:p>
+        </p:txBody>
+      </p:sp>
+      <p:sp>
+        <p:nvSpPr>
+          <p:cNvPr id="8" name="TextBox 7"/>
+          <p:cNvSpPr txBox="1"/>
+          <p:nvPr/>
+        </p:nvSpPr>
+        <p:spPr>
+          <a:xfrm>
+            <a:off x="1490472" y="2441448"/>
+            <a:ext cx="9631375" cy="640080"/>
+          </a:xfrm>
+          <a:prstGeom prst="rect">
+            <a:avLst/>
+          </a:prstGeom>
+          <a:noFill/>
+        </p:spPr>
+        <p:txBody>
+          <a:bodyPr wrap="square" lIns="0" tIns="0" rIns="0" bIns="0">
+            <a:spAutoFit/>
+          </a:bodyPr>
+          <a:lstStyle/>
+          <a:p>
+            <a:pPr algn="l">
+              <a:lnSpc>
+                <a:spcPct val="115000"/>
+              </a:lnSpc>
+              <a:spcBef>
+                <a:spcPts val="0"/>
+              </a:spcBef>
+              <a:spcAft>
+                <a:spcPts val="400"/>
+              </a:spcAft>
+            </a:pPr>
+            <a:r>
+              <a:rPr sz="1500" b="1">
+                <a:solidFill>
+                  <a:srgbClr val="17150F"/>
+                </a:solidFill>
+                <a:latin typeface="Arial"/>
+              </a:rPr>
+              <a:t>La decisión no es el pronóstico, es el cuantil</a:t>
+            </a:r>
+          </a:p>
+          <a:p>
+            <a:pPr algn="l">
+              <a:lnSpc>
+                <a:spcPct val="125000"/>
+              </a:lnSpc>
+              <a:spcBef>
+                <a:spcPts val="0"/>
+              </a:spcBef>
+              <a:spcAft>
+                <a:spcPts val="0"/>
+              </a:spcAft>
+            </a:pPr>
+            <a:r>
+              <a:rPr sz="1250" b="0">
+                <a:solidFill>
+                  <a:srgbClr val="555045"/>
+                </a:solidFill>
+                <a:latin typeface="Arial"/>
+              </a:rPr>
+              <a:t>Cada producto pide el nivel que marcan sus dos costes. El colchón va del 2,7 % al 6,3 % según el margen, sin que nadie lo decida a mano.</a:t>
+            </a:r>
+          </a:p>
+        </p:txBody>
+      </p:sp>
+      <p:sp>
+        <p:nvSpPr>
+          <p:cNvPr id="9" name="Rectangle 8"/>
+          <p:cNvSpPr/>
+          <p:nvPr/>
+        </p:nvSpPr>
+        <p:spPr>
+          <a:xfrm>
+            <a:off x="777240" y="3291840"/>
+            <a:ext cx="10637215" cy="914400"/>
+          </a:xfrm>
+          <a:prstGeom prst="rect">
+            <a:avLst/>
+          </a:prstGeom>
+          <a:solidFill>
+            <a:srgbClr val="FFFFFF"/>
+          </a:solidFill>
+          <a:ln w="9525">
+            <a:solidFill>
+              <a:srgbClr val="DCD8CF"/>
+            </a:solidFill>
+          </a:ln>
+          <a:effectLst/>
+        </p:spPr>
+        <p:style>
+          <a:lnRef idx="1">
+            <a:schemeClr val="accent1"/>
+          </a:lnRef>
+          <a:fillRef idx="3">
+            <a:schemeClr val="accent1"/>
+          </a:fillRef>
+          <a:effectRef idx="2">
+            <a:schemeClr val="accent1"/>
+          </a:effectRef>
+          <a:fontRef idx="minor">
+            <a:schemeClr val="lt1"/>
+          </a:fontRef>
+        </p:style>
+        <p:txBody>
+          <a:bodyPr rtlCol="0" anchor="ctr"/>
+          <a:lstStyle/>
+          <a:p>
+            <a:pPr algn="ctr"/>
+            <a:endParaRPr/>
+          </a:p>
+        </p:txBody>
+      </p:sp>
+      <p:sp>
+        <p:nvSpPr>
+          <p:cNvPr id="10" name="TextBox 9"/>
+          <p:cNvSpPr txBox="1"/>
+          <p:nvPr/>
+        </p:nvSpPr>
+        <p:spPr>
+          <a:xfrm>
+            <a:off x="1014984" y="3474720"/>
+            <a:ext cx="365760" cy="548640"/>
+          </a:xfrm>
+          <a:prstGeom prst="rect">
+            <a:avLst/>
+          </a:prstGeom>
+          <a:noFill/>
+        </p:spPr>
+        <p:txBody>
+          <a:bodyPr wrap="square" lIns="0" tIns="0" rIns="0" bIns="0">
+            <a:spAutoFit/>
+          </a:bodyPr>
+          <a:lstStyle/>
+          <a:p>
+            <a:pPr algn="l">
+              <a:lnSpc>
+                <a:spcPct val="100000"/>
+              </a:lnSpc>
+              <a:spcBef>
+                <a:spcPts val="0"/>
+              </a:spcBef>
+              <a:spcAft>
+                <a:spcPts val="0"/>
+              </a:spcAft>
+            </a:pPr>
+            <a:r>
+              <a:rPr sz="2200" b="1">
+                <a:solidFill>
+                  <a:srgbClr val="8C2F39"/>
+                </a:solidFill>
+                <a:latin typeface="Arial"/>
+              </a:rPr>
+              <a:t>2</a:t>
+            </a:r>
+          </a:p>
+        </p:txBody>
+      </p:sp>
+      <p:sp>
+        <p:nvSpPr>
+          <p:cNvPr id="11" name="TextBox 10"/>
+          <p:cNvSpPr txBox="1"/>
+          <p:nvPr/>
+        </p:nvSpPr>
+        <p:spPr>
+          <a:xfrm>
+            <a:off x="1490472" y="3447288"/>
+            <a:ext cx="9631375" cy="640080"/>
+          </a:xfrm>
+          <a:prstGeom prst="rect">
+            <a:avLst/>
+          </a:prstGeom>
+          <a:noFill/>
+        </p:spPr>
+        <p:txBody>
+          <a:bodyPr wrap="square" lIns="0" tIns="0" rIns="0" bIns="0">
+            <a:spAutoFit/>
+          </a:bodyPr>
+          <a:lstStyle/>
+          <a:p>
+            <a:pPr algn="l">
+              <a:lnSpc>
+                <a:spcPct val="115000"/>
+              </a:lnSpc>
+              <a:spcBef>
+                <a:spcPts val="0"/>
+              </a:spcBef>
+              <a:spcAft>
+                <a:spcPts val="400"/>
+              </a:spcAft>
+            </a:pPr>
+            <a:r>
+              <a:rPr sz="1500" b="1">
+                <a:solidFill>
+                  <a:srgbClr val="17150F"/>
+                </a:solidFill>
+                <a:latin typeface="Arial"/>
+              </a:rPr>
+              <a:t>La regla aporta más que el modelo</a:t>
+            </a:r>
+          </a:p>
+          <a:p>
+            <a:pPr algn="l">
+              <a:lnSpc>
+                <a:spcPct val="125000"/>
+              </a:lnSpc>
+              <a:spcBef>
+                <a:spcPts val="0"/>
+              </a:spcBef>
+              <a:spcAft>
+                <a:spcPts val="0"/>
+              </a:spcAft>
+            </a:pPr>
+            <a:r>
+              <a:rPr sz="1250" b="0">
+                <a:solidFill>
+                  <a:srgbClr val="555045"/>
+                </a:solidFill>
+                <a:latin typeface="Arial"/>
+              </a:rPr>
+              <a:t>Seis de cada diez pesos del ahorro vienen de cambiar la regla de pedido. El modelo aporta uno de cada diez. Es incómodo y dice dónde poner el esfuerzo.</a:t>
+            </a:r>
+          </a:p>
+        </p:txBody>
+      </p:sp>
+      <p:sp>
+        <p:nvSpPr>
+          <p:cNvPr id="12" name="Rectangle 11"/>
+          <p:cNvSpPr/>
+          <p:nvPr/>
+        </p:nvSpPr>
+        <p:spPr>
+          <a:xfrm>
+            <a:off x="777240" y="4297680"/>
+            <a:ext cx="10637215" cy="914400"/>
+          </a:xfrm>
+          <a:prstGeom prst="rect">
+            <a:avLst/>
+          </a:prstGeom>
+          <a:solidFill>
+            <a:srgbClr val="FFFFFF"/>
+          </a:solidFill>
+          <a:ln w="9525">
+            <a:solidFill>
+              <a:srgbClr val="DCD8CF"/>
+            </a:solidFill>
+          </a:ln>
+          <a:effectLst/>
+        </p:spPr>
+        <p:style>
+          <a:lnRef idx="1">
+            <a:schemeClr val="accent1"/>
+          </a:lnRef>
+          <a:fillRef idx="3">
+            <a:schemeClr val="accent1"/>
+          </a:fillRef>
+          <a:effectRef idx="2">
+            <a:schemeClr val="accent1"/>
+          </a:effectRef>
+          <a:fontRef idx="minor">
+            <a:schemeClr val="lt1"/>
+          </a:fontRef>
+        </p:style>
+        <p:txBody>
+          <a:bodyPr rtlCol="0" anchor="ctr"/>
+          <a:lstStyle/>
+          <a:p>
+            <a:pPr algn="ctr"/>
+            <a:endParaRPr/>
+          </a:p>
+        </p:txBody>
+      </p:sp>
+      <p:sp>
+        <p:nvSpPr>
+          <p:cNvPr id="13" name="TextBox 12"/>
+          <p:cNvSpPr txBox="1"/>
+          <p:nvPr/>
+        </p:nvSpPr>
+        <p:spPr>
+          <a:xfrm>
+            <a:off x="1014984" y="4480560"/>
+            <a:ext cx="365760" cy="548640"/>
+          </a:xfrm>
+          <a:prstGeom prst="rect">
+            <a:avLst/>
+          </a:prstGeom>
+          <a:noFill/>
+        </p:spPr>
+        <p:txBody>
+          <a:bodyPr wrap="square" lIns="0" tIns="0" rIns="0" bIns="0">
+            <a:spAutoFit/>
+          </a:bodyPr>
+          <a:lstStyle/>
+          <a:p>
+            <a:pPr algn="l">
+              <a:lnSpc>
+                <a:spcPct val="100000"/>
+              </a:lnSpc>
+              <a:spcBef>
+                <a:spcPts val="0"/>
+              </a:spcBef>
+              <a:spcAft>
+                <a:spcPts val="0"/>
+              </a:spcAft>
+            </a:pPr>
+            <a:r>
+              <a:rPr sz="2200" b="1">
+                <a:solidFill>
+                  <a:srgbClr val="8C2F39"/>
+                </a:solidFill>
+                <a:latin typeface="Arial"/>
+              </a:rPr>
+              <a:t>3</a:t>
+            </a:r>
+          </a:p>
+        </p:txBody>
+      </p:sp>
+      <p:sp>
+        <p:nvSpPr>
+          <p:cNvPr id="14" name="TextBox 13"/>
+          <p:cNvSpPr txBox="1"/>
+          <p:nvPr/>
+        </p:nvSpPr>
+        <p:spPr>
+          <a:xfrm>
+            <a:off x="1490472" y="4453128"/>
+            <a:ext cx="9631375" cy="640080"/>
+          </a:xfrm>
+          <a:prstGeom prst="rect">
+            <a:avLst/>
+          </a:prstGeom>
+          <a:noFill/>
+        </p:spPr>
+        <p:txBody>
+          <a:bodyPr wrap="square" lIns="0" tIns="0" rIns="0" bIns="0">
+            <a:spAutoFit/>
+          </a:bodyPr>
+          <a:lstStyle/>
+          <a:p>
+            <a:pPr algn="l">
+              <a:lnSpc>
+                <a:spcPct val="115000"/>
+              </a:lnSpc>
+              <a:spcBef>
+                <a:spcPts val="0"/>
+              </a:spcBef>
+              <a:spcAft>
+                <a:spcPts val="400"/>
+              </a:spcAft>
+            </a:pPr>
+            <a:r>
+              <a:rPr sz="1500" b="1">
+                <a:solidFill>
+                  <a:srgbClr val="17150F"/>
+                </a:solidFill>
+                <a:latin typeface="Arial"/>
+              </a:rPr>
+              <a:t>El resultado depende de un supuesto de negocio</a:t>
+            </a:r>
+          </a:p>
+          <a:p>
+            <a:pPr algn="l">
+              <a:lnSpc>
+                <a:spcPct val="125000"/>
+              </a:lnSpc>
+              <a:spcBef>
+                <a:spcPts val="0"/>
+              </a:spcBef>
+              <a:spcAft>
+                <a:spcPts val="0"/>
+              </a:spcAft>
+            </a:pPr>
+            <a:r>
+              <a:rPr sz="1250" b="0">
+                <a:solidFill>
+                  <a:srgbClr val="555045"/>
+                </a:solidFill>
+                <a:latin typeface="Arial"/>
+              </a:rPr>
+              <a:t>Si el sobrante se guarda, el ahorro es del 92,6 %. Si se tira, del 5,2 %. Recomendamos planificar con el segundo y medir la merma real en el piloto.</a:t>
+            </a:r>
+          </a:p>
+        </p:txBody>
+      </p:sp>
+      <p:sp>
+        <p:nvSpPr>
+          <p:cNvPr id="15" name="Rectangle 14"/>
+          <p:cNvSpPr/>
+          <p:nvPr/>
+        </p:nvSpPr>
+        <p:spPr>
+          <a:xfrm>
+            <a:off x="777240" y="5303520"/>
+            <a:ext cx="10637215" cy="914400"/>
+          </a:xfrm>
+          <a:prstGeom prst="rect">
+            <a:avLst/>
+          </a:prstGeom>
+          <a:solidFill>
+            <a:srgbClr val="FFFFFF"/>
+          </a:solidFill>
+          <a:ln w="9525">
+            <a:solidFill>
+              <a:srgbClr val="DCD8CF"/>
+            </a:solidFill>
+          </a:ln>
+          <a:effectLst/>
+        </p:spPr>
+        <p:style>
+          <a:lnRef idx="1">
+            <a:schemeClr val="accent1"/>
+          </a:lnRef>
+          <a:fillRef idx="3">
+            <a:schemeClr val="accent1"/>
+          </a:fillRef>
+          <a:effectRef idx="2">
+            <a:schemeClr val="accent1"/>
+          </a:effectRef>
+          <a:fontRef idx="minor">
+            <a:schemeClr val="lt1"/>
+          </a:fontRef>
+        </p:style>
+        <p:txBody>
+          <a:bodyPr rtlCol="0" anchor="ctr"/>
+          <a:lstStyle/>
+          <a:p>
+            <a:pPr algn="ctr"/>
+            <a:endParaRPr/>
+          </a:p>
+        </p:txBody>
+      </p:sp>
+      <p:sp>
+        <p:nvSpPr>
+          <p:cNvPr id="16" name="TextBox 15"/>
+          <p:cNvSpPr txBox="1"/>
+          <p:nvPr/>
+        </p:nvSpPr>
+        <p:spPr>
+          <a:xfrm>
+            <a:off x="1014984" y="5486400"/>
+            <a:ext cx="365760" cy="548640"/>
+          </a:xfrm>
+          <a:prstGeom prst="rect">
+            <a:avLst/>
+          </a:prstGeom>
+          <a:noFill/>
+        </p:spPr>
+        <p:txBody>
+          <a:bodyPr wrap="square" lIns="0" tIns="0" rIns="0" bIns="0">
+            <a:spAutoFit/>
+          </a:bodyPr>
+          <a:lstStyle/>
+          <a:p>
+            <a:pPr algn="l">
+              <a:lnSpc>
+                <a:spcPct val="100000"/>
+              </a:lnSpc>
+              <a:spcBef>
+                <a:spcPts val="0"/>
+              </a:spcBef>
+              <a:spcAft>
+                <a:spcPts val="0"/>
+              </a:spcAft>
+            </a:pPr>
+            <a:r>
+              <a:rPr sz="2200" b="1">
+                <a:solidFill>
+                  <a:srgbClr val="8C2F39"/>
+                </a:solidFill>
+                <a:latin typeface="Arial"/>
+              </a:rPr>
+              <a:t>4</a:t>
+            </a:r>
+          </a:p>
+        </p:txBody>
+      </p:sp>
+      <p:sp>
+        <p:nvSpPr>
+          <p:cNvPr id="17" name="TextBox 16"/>
+          <p:cNvSpPr txBox="1"/>
+          <p:nvPr/>
+        </p:nvSpPr>
+        <p:spPr>
+          <a:xfrm>
+            <a:off x="1490472" y="5458968"/>
+            <a:ext cx="9631375" cy="640080"/>
+          </a:xfrm>
+          <a:prstGeom prst="rect">
+            <a:avLst/>
+          </a:prstGeom>
+          <a:noFill/>
+        </p:spPr>
+        <p:txBody>
+          <a:bodyPr wrap="square" lIns="0" tIns="0" rIns="0" bIns="0">
+            <a:spAutoFit/>
+          </a:bodyPr>
+          <a:lstStyle/>
+          <a:p>
+            <a:pPr algn="l">
+              <a:lnSpc>
+                <a:spcPct val="115000"/>
+              </a:lnSpc>
+              <a:spcBef>
+                <a:spcPts val="0"/>
+              </a:spcBef>
+              <a:spcAft>
+                <a:spcPts val="400"/>
+              </a:spcAft>
+            </a:pPr>
+            <a:r>
+              <a:rPr sz="1500" b="1">
+                <a:solidFill>
+                  <a:srgbClr val="17150F"/>
+                </a:solidFill>
+                <a:latin typeface="Arial"/>
+              </a:rPr>
+              <a:t>Lo que se entrega ya se puede ejecutar</a:t>
+            </a:r>
+          </a:p>
+          <a:p>
+            <a:pPr algn="l">
+              <a:lnSpc>
+                <a:spcPct val="125000"/>
+              </a:lnSpc>
+              <a:spcBef>
+                <a:spcPts val="0"/>
+              </a:spcBef>
+              <a:spcAft>
+                <a:spcPts val="0"/>
+              </a:spcAft>
+            </a:pPr>
+            <a:r>
+              <a:rPr sz="1250" b="0">
+                <a:solidFill>
+                  <a:srgbClr val="555045"/>
+                </a:solidFill>
+                <a:latin typeface="Arial"/>
+              </a:rPr>
+              <a:t>12.290 unidades para la semana 14, tienda por tienda y producto por producto, con doce verificaciones en verde.</a:t>
+            </a:r>
+          </a:p>
+        </p:txBody>
+      </p:sp>
+      <p:sp>
+        <p:nvSpPr>
+          <p:cNvPr id="18" name="TextBox 17"/>
+          <p:cNvSpPr txBox="1"/>
+          <p:nvPr/>
+        </p:nvSpPr>
+        <p:spPr>
+          <a:xfrm>
+            <a:off x="10500055" y="6428232"/>
+            <a:ext cx="914400" cy="161519"/>
+          </a:xfrm>
+          <a:prstGeom prst="rect">
+            <a:avLst/>
+          </a:prstGeom>
+          <a:noFill/>
+        </p:spPr>
+        <p:txBody>
+          <a:bodyPr wrap="square" lIns="0" tIns="0" rIns="0" bIns="0">
+            <a:spAutoFit/>
+          </a:bodyPr>
+          <a:lstStyle/>
+          <a:p>
+            <a:pPr algn="r">
+              <a:lnSpc>
+                <a:spcPct val="122000"/>
+              </a:lnSpc>
+              <a:spcBef>
+                <a:spcPts val="0"/>
+              </a:spcBef>
+              <a:spcAft>
+                <a:spcPts val="0"/>
+              </a:spcAft>
+            </a:pPr>
+            <a:r>
+              <a:rPr lang="es-419" sz="950" dirty="0">
+                <a:solidFill>
+                  <a:srgbClr val="8B8478"/>
+                </a:solidFill>
+                <a:latin typeface="Arial"/>
+              </a:rPr>
+              <a:t>28</a:t>
+            </a:r>
+            <a:endParaRPr sz="950" b="0" dirty="0">
+              <a:solidFill>
+                <a:srgbClr val="8B8478"/>
+              </a:solidFill>
+              <a:latin typeface="Arial"/>
+            </a:endParaRPr>
+          </a:p>
+        </p:txBody>
+      </p:sp>
+    </p:spTree>
+  </p:cSld>
+  <p:clrMapOvr>
+    <a:masterClrMapping/>
+  </p:clrMapOvr>
+</p:sld>
+</file>
+
+<file path=ppt/slides/slide26.xml><?xml version="1.0" encoding="utf-8"?>
+<p:sld xmlns:a="http://schemas.openxmlformats.org/drawingml/2006/main" xmlns:r="http://schemas.openxmlformats.org/officeDocument/2006/relationships" xmlns:p="http://schemas.openxmlformats.org/presentationml/2006/main">
+  <p:cSld>
+    <p:spTree>
+      <p:nvGrpSpPr>
+        <p:cNvPr id="1" name=""/>
+        <p:cNvGrpSpPr/>
+        <p:nvPr/>
+      </p:nvGrpSpPr>
+      <p:grpSpPr>
+        <a:xfrm>
+          <a:off x="0" y="0"/>
+          <a:ext cx="0" cy="0"/>
+          <a:chOff x="0" y="0"/>
+          <a:chExt cx="0" cy="0"/>
+        </a:xfrm>
+      </p:grpSpPr>
+      <p:sp>
+        <p:nvSpPr>
+          <p:cNvPr id="2" name="Rectangle 1"/>
+          <p:cNvSpPr/>
+          <p:nvPr/>
+        </p:nvSpPr>
+        <p:spPr>
+          <a:xfrm>
+            <a:off x="0" y="0"/>
+            <a:ext cx="12191695" cy="6858000"/>
+          </a:xfrm>
+          <a:prstGeom prst="rect">
+            <a:avLst/>
+          </a:prstGeom>
+          <a:solidFill>
             <a:srgbClr val="FFFFFF"/>
           </a:solidFill>
           <a:ln>
@@ -39657,7 +40550,7 @@
 </p:sld>
 </file>
 
-<file path=ppt/slides/slide26.xml><?xml version="1.0" encoding="utf-8"?>
+<file path=ppt/slides/slide27.xml><?xml version="1.0" encoding="utf-8"?>
 <p:sld xmlns:a="http://schemas.openxmlformats.org/drawingml/2006/main" xmlns:r="http://schemas.openxmlformats.org/officeDocument/2006/relationships" xmlns:p="http://schemas.openxmlformats.org/presentationml/2006/main">
   <p:cSld>
     <p:spTree>
